--- a/examples/demo_business_report.pptx
+++ b/examples/demo_business_report.pptx
@@ -10374,7 +10374,7 @@
           </a:ln>
         </p:spPr>
         <p:txBody>
-          <a:bodyPr rtlCol="0" anchor="ctr" wrap="square" lIns="73152" tIns="18288" rIns="212598" bIns="18288">
+          <a:bodyPr rtlCol="0" anchor="ctr" wrap="square" lIns="54864" tIns="18288" rIns="54864" bIns="18288">
             <a:noAutofit/>
           </a:bodyPr>
           <a:lstStyle/>
@@ -10424,7 +10424,7 @@
           </a:ln>
         </p:spPr>
         <p:txBody>
-          <a:bodyPr rtlCol="0" anchor="ctr" wrap="square" lIns="212598" tIns="18288" rIns="212598" bIns="18288">
+          <a:bodyPr rtlCol="0" anchor="ctr" wrap="square" lIns="54864" tIns="18288" rIns="54864" bIns="18288">
             <a:noAutofit/>
           </a:bodyPr>
           <a:lstStyle/>
@@ -10474,7 +10474,7 @@
           </a:ln>
         </p:spPr>
         <p:txBody>
-          <a:bodyPr rtlCol="0" anchor="ctr" wrap="square" lIns="212598" tIns="18288" rIns="212598" bIns="18288">
+          <a:bodyPr rtlCol="0" anchor="ctr" wrap="square" lIns="54864" tIns="18288" rIns="54864" bIns="18288">
             <a:noAutofit/>
           </a:bodyPr>
           <a:lstStyle/>
@@ -10524,7 +10524,7 @@
           </a:ln>
         </p:spPr>
         <p:txBody>
-          <a:bodyPr rtlCol="0" anchor="ctr" wrap="square" lIns="212598" tIns="18288" rIns="212598" bIns="18288">
+          <a:bodyPr rtlCol="0" anchor="ctr" wrap="square" lIns="54864" tIns="18288" rIns="54864" bIns="18288">
             <a:noAutofit/>
           </a:bodyPr>
           <a:lstStyle/>
